--- a/outputs/AI-Driven-Adaptive-DASH-Streaming-QoS .pptx
+++ b/outputs/AI-Driven-Adaptive-DASH-Streaming-QoS .pptx
@@ -1429,6 +1429,13 @@
             <a:prstDash val="solid"/>
           </a:ln>
         </p:spPr>
+        <p:txBody>
+          <a:bodyPr/>
+          <a:lstStyle/>
+          <a:p>
+            <a:endParaRPr lang="en-IN" dirty="0"/>
+          </a:p>
+        </p:txBody>
       </p:sp>
       <p:sp>
         <p:nvSpPr>
@@ -1580,7 +1587,7 @@
               </a:defRPr>
             </a:pPr>
             <a:r>
-              <a:rPr sz="3750" b="1">
+              <a:rPr sz="3750" b="1" dirty="0">
                 <a:solidFill>
                   <a:srgbClr val="F6F2EA"/>
                 </a:solidFill>
@@ -1805,7 +1812,7 @@
               </a:defRPr>
             </a:pPr>
             <a:r>
-              <a:rPr sz="900" b="0">
+              <a:rPr sz="900" b="0" dirty="0">
                 <a:solidFill>
                   <a:srgbClr val="8EA3B8"/>
                 </a:solidFill>
@@ -2847,6 +2854,128 @@
               </a:rPr>
               <a:t>01</a:t>
             </a:r>
+          </a:p>
+        </p:txBody>
+      </p:sp>
+      <p:sp>
+        <p:nvSpPr>
+          <p:cNvPr id="30" name="TextBox 29">
+            <a:extLst>
+              <a:ext uri="{FF2B5EF4-FFF2-40B4-BE49-F238E27FC236}">
+                <a16:creationId xmlns:a16="http://schemas.microsoft.com/office/drawing/2014/main" id="{D534AFAF-F940-854E-5387-80174CB9ECDD}"/>
+              </a:ext>
+            </a:extLst>
+          </p:cNvPr>
+          <p:cNvSpPr txBox="1"/>
+          <p:nvPr/>
+        </p:nvSpPr>
+        <p:spPr>
+          <a:xfrm>
+            <a:off x="4133850" y="116976"/>
+            <a:ext cx="5098640" cy="830997"/>
+          </a:xfrm>
+          <a:prstGeom prst="rect">
+            <a:avLst/>
+          </a:prstGeom>
+          <a:noFill/>
+        </p:spPr>
+        <p:txBody>
+          <a:bodyPr wrap="square" rtlCol="0">
+            <a:spAutoFit/>
+          </a:bodyPr>
+          <a:lstStyle/>
+          <a:p>
+            <a:pPr algn="ctr"/>
+            <a:r>
+              <a:rPr lang="en-US" sz="2400" dirty="0">
+                <a:solidFill>
+                  <a:schemeClr val="bg1">
+                    <a:lumMod val="95000"/>
+                  </a:schemeClr>
+                </a:solidFill>
+                <a:latin typeface="Aptos" panose="020B0004020202020204" pitchFamily="34" charset="0"/>
+              </a:rPr>
+              <a:t>Computer Networks &amp; Protocols</a:t>
+            </a:r>
+          </a:p>
+          <a:p>
+            <a:pPr algn="ctr"/>
+            <a:r>
+              <a:rPr lang="en-US" sz="2400" dirty="0">
+                <a:solidFill>
+                  <a:schemeClr val="bg1">
+                    <a:lumMod val="95000"/>
+                  </a:schemeClr>
+                </a:solidFill>
+                <a:latin typeface="Aptos" panose="020B0004020202020204" pitchFamily="34" charset="0"/>
+              </a:rPr>
+              <a:t>Project Based Learning </a:t>
+            </a:r>
+            <a:endParaRPr lang="en-IN" sz="2400" dirty="0">
+              <a:solidFill>
+                <a:schemeClr val="bg1">
+                  <a:lumMod val="95000"/>
+                </a:schemeClr>
+              </a:solidFill>
+              <a:latin typeface="Aptos" panose="020B0004020202020204" pitchFamily="34" charset="0"/>
+            </a:endParaRPr>
+          </a:p>
+        </p:txBody>
+      </p:sp>
+      <p:sp>
+        <p:nvSpPr>
+          <p:cNvPr id="31" name="TextBox 30">
+            <a:extLst>
+              <a:ext uri="{FF2B5EF4-FFF2-40B4-BE49-F238E27FC236}">
+                <a16:creationId xmlns:a16="http://schemas.microsoft.com/office/drawing/2014/main" id="{F91D42BE-4FE8-1EDD-06AE-F6D6F2295468}"/>
+              </a:ext>
+            </a:extLst>
+          </p:cNvPr>
+          <p:cNvSpPr txBox="1"/>
+          <p:nvPr/>
+        </p:nvSpPr>
+        <p:spPr>
+          <a:xfrm>
+            <a:off x="816077" y="5309419"/>
+            <a:ext cx="5968181" cy="646331"/>
+          </a:xfrm>
+          <a:prstGeom prst="rect">
+            <a:avLst/>
+          </a:prstGeom>
+          <a:noFill/>
+        </p:spPr>
+        <p:txBody>
+          <a:bodyPr wrap="square" rtlCol="0">
+            <a:spAutoFit/>
+          </a:bodyPr>
+          <a:lstStyle/>
+          <a:p>
+            <a:r>
+              <a:rPr lang="en-US" dirty="0">
+                <a:solidFill>
+                  <a:schemeClr val="bg1"/>
+                </a:solidFill>
+                <a:latin typeface="Aptos" panose="020B0004020202020204" pitchFamily="34" charset="0"/>
+              </a:rPr>
+              <a:t>Presented By-  Udit Singh (1RV23EC174)</a:t>
+            </a:r>
+          </a:p>
+          <a:p>
+            <a:r>
+              <a:rPr lang="en-US" dirty="0">
+                <a:solidFill>
+                  <a:schemeClr val="bg1"/>
+                </a:solidFill>
+                <a:latin typeface="Aptos" panose="020B0004020202020204" pitchFamily="34" charset="0"/>
+              </a:rPr>
+              <a:t>                                Vipul S. (1RV23EC185)</a:t>
+            </a:r>
+            <a:endParaRPr lang="en-IN" dirty="0">
+              <a:solidFill>
+                <a:schemeClr val="bg1"/>
+              </a:solidFill>
+              <a:latin typeface="Aptos" panose="020B0004020202020204" pitchFamily="34" charset="0"/>
+            </a:endParaRPr>
           </a:p>
         </p:txBody>
       </p:sp>
@@ -5034,7 +5163,7 @@
         </p:nvSpPr>
         <p:spPr>
           <a:xfrm>
-            <a:off x="895350" y="5010150"/>
+            <a:off x="885517" y="5185287"/>
             <a:ext cx="9620250" cy="704850"/>
           </a:xfrm>
           <a:prstGeom prst="rect">
@@ -5067,7 +5196,7 @@
         </p:nvSpPr>
         <p:spPr>
           <a:xfrm>
-            <a:off x="1181100" y="5219700"/>
+            <a:off x="1181100" y="5318944"/>
             <a:ext cx="1714500" cy="228600"/>
           </a:xfrm>
           <a:prstGeom prst="rect">
@@ -5102,7 +5231,7 @@
               </a:defRPr>
             </a:pPr>
             <a:r>
-              <a:rPr sz="1500" b="1">
+              <a:rPr sz="1500" b="1" dirty="0">
                 <a:solidFill>
                   <a:srgbClr val="FF6B5F"/>
                 </a:solidFill>
@@ -5131,7 +5260,7 @@
         </p:nvSpPr>
         <p:spPr>
           <a:xfrm>
-            <a:off x="3143250" y="5162550"/>
+            <a:off x="2895600" y="5282688"/>
             <a:ext cx="6858000" cy="361950"/>
           </a:xfrm>
           <a:prstGeom prst="rect">
@@ -5166,7 +5295,7 @@
               </a:defRPr>
             </a:pPr>
             <a:r>
-              <a:rPr sz="1200" b="0">
+              <a:rPr sz="1200" b="0" dirty="0">
                 <a:solidFill>
                   <a:srgbClr val="F6F2EA"/>
                 </a:solidFill>
@@ -14903,7 +15032,7 @@
         </p:nvSpPr>
         <p:spPr>
           <a:xfrm>
-            <a:off x="514350" y="723900"/>
+            <a:off x="2019300" y="145378"/>
             <a:ext cx="7810500" cy="1104900"/>
           </a:xfrm>
           <a:prstGeom prst="rect">
@@ -14938,7 +15067,7 @@
               </a:defRPr>
             </a:pPr>
             <a:r>
-              <a:rPr sz="3150" b="1">
+              <a:rPr sz="3150" b="1" dirty="0">
                 <a:solidFill>
                   <a:srgbClr val="08111F"/>
                 </a:solidFill>
@@ -15917,9 +16046,143 @@
           </a:p>
         </p:txBody>
       </p:sp>
+      <p:sp>
+        <p:nvSpPr>
+          <p:cNvPr id="25" name="Rectangle 24">
+            <a:extLst>
+              <a:ext uri="{FF2B5EF4-FFF2-40B4-BE49-F238E27FC236}">
+                <a16:creationId xmlns:a16="http://schemas.microsoft.com/office/drawing/2014/main" id="{3ABF5993-102A-4407-9766-FE2CCB53CDA0}"/>
+              </a:ext>
+            </a:extLst>
+          </p:cNvPr>
+          <p:cNvSpPr>
+            <a:spLocks noGrp="1"/>
+          </p:cNvSpPr>
+          <p:nvPr/>
+        </p:nvSpPr>
+        <p:spPr>
+          <a:xfrm>
+            <a:off x="533400" y="6534150"/>
+            <a:ext cx="8858250" cy="285750"/>
+          </a:xfrm>
+          <a:prstGeom prst="rect">
+            <a:avLst/>
+          </a:prstGeom>
+          <a:solidFill>
+            <a:srgbClr val="000000">
+              <a:alpha val="0"/>
+            </a:srgbClr>
+          </a:solidFill>
+          <a:ln w="0">
+            <a:solidFill>
+              <a:srgbClr val="000000">
+                <a:alpha val="0"/>
+              </a:srgbClr>
+            </a:solidFill>
+            <a:prstDash val="solid"/>
+          </a:ln>
+        </p:spPr>
+        <p:txBody>
+          <a:bodyPr lIns="0" tIns="0" rIns="0" bIns="0" anchor="t"/>
+          <a:lstStyle/>
+          <a:p>
+            <a:pPr algn="l">
+              <a:defRPr sz="1275" b="0">
+                <a:solidFill>
+                  <a:srgbClr val="54677C"/>
+                </a:solidFill>
+                <a:latin typeface="Aptos"/>
+                <a:ea typeface="Aptos"/>
+                <a:cs typeface="Aptos"/>
+              </a:defRPr>
+            </a:pPr>
+            <a:r>
+              <a:rPr sz="1275" b="0" dirty="0">
+                <a:solidFill>
+                  <a:srgbClr val="54677C"/>
+                </a:solidFill>
+                <a:latin typeface="Aptos"/>
+                <a:ea typeface="Aptos"/>
+                <a:cs typeface="Aptos"/>
+              </a:rPr>
+              <a:t>Quality selection changes as measured throughput varies, while AI confidence remains high on average.</a:t>
+            </a:r>
+          </a:p>
+        </p:txBody>
+      </p:sp>
+      <p:sp>
+        <p:nvSpPr>
+          <p:cNvPr id="27" name="Rectangle 26">
+            <a:extLst>
+              <a:ext uri="{FF2B5EF4-FFF2-40B4-BE49-F238E27FC236}">
+                <a16:creationId xmlns:a16="http://schemas.microsoft.com/office/drawing/2014/main" id="{D643C6AF-A1E2-4DEF-9BF7-AD0C9F5BBC5D}"/>
+              </a:ext>
+            </a:extLst>
+          </p:cNvPr>
+          <p:cNvSpPr>
+            <a:spLocks noGrp="1"/>
+          </p:cNvSpPr>
+          <p:nvPr/>
+        </p:nvSpPr>
+        <p:spPr>
+          <a:xfrm>
+            <a:off x="11163300" y="6438900"/>
+            <a:ext cx="514350" cy="190500"/>
+          </a:xfrm>
+          <a:prstGeom prst="rect">
+            <a:avLst/>
+          </a:prstGeom>
+          <a:solidFill>
+            <a:srgbClr val="000000">
+              <a:alpha val="0"/>
+            </a:srgbClr>
+          </a:solidFill>
+          <a:ln w="0">
+            <a:solidFill>
+              <a:srgbClr val="000000">
+                <a:alpha val="0"/>
+              </a:srgbClr>
+            </a:solidFill>
+            <a:prstDash val="solid"/>
+          </a:ln>
+        </p:spPr>
+        <p:txBody>
+          <a:bodyPr lIns="0" tIns="0" rIns="0" bIns="0" anchor="t"/>
+          <a:lstStyle/>
+          <a:p>
+            <a:pPr algn="r">
+              <a:defRPr sz="825" b="0">
+                <a:solidFill>
+                  <a:srgbClr val="8EA3B8"/>
+                </a:solidFill>
+                <a:latin typeface="Aptos Mono"/>
+                <a:ea typeface="Aptos Mono"/>
+                <a:cs typeface="Aptos Mono"/>
+              </a:defRPr>
+            </a:pPr>
+            <a:r>
+              <a:rPr sz="825" b="0">
+                <a:solidFill>
+                  <a:srgbClr val="8EA3B8"/>
+                </a:solidFill>
+                <a:latin typeface="Aptos Mono"/>
+                <a:ea typeface="Aptos Mono"/>
+                <a:cs typeface="Aptos Mono"/>
+              </a:rPr>
+              <a:t>08</a:t>
+            </a:r>
+          </a:p>
+        </p:txBody>
+      </p:sp>
       <p:pic>
         <p:nvPicPr>
-          <p:cNvPr id="23" name="Picture 22"/>
+          <p:cNvPr id="30" name="Picture 29">
+            <a:extLst>
+              <a:ext uri="{FF2B5EF4-FFF2-40B4-BE49-F238E27FC236}">
+                <a16:creationId xmlns:a16="http://schemas.microsoft.com/office/drawing/2014/main" id="{02129BA4-8351-861E-2A28-BAB2F885BFD8}"/>
+              </a:ext>
+            </a:extLst>
+          </p:cNvPr>
           <p:cNvPicPr>
             <a:picLocks noChangeAspect="1"/>
           </p:cNvPicPr>
@@ -15927,12 +16190,14 @@
         </p:nvPicPr>
         <p:blipFill>
           <a:blip r:embed="rId3"/>
-          <a:stretch/>
+          <a:stretch>
+            <a:fillRect/>
+          </a:stretch>
         </p:blipFill>
         <p:spPr>
           <a:xfrm>
-            <a:off x="819150" y="3314700"/>
-            <a:ext cx="4762500" cy="1905000"/>
+            <a:off x="243963" y="1158452"/>
+            <a:ext cx="11395587" cy="1615631"/>
           </a:xfrm>
           <a:prstGeom prst="rect">
             <a:avLst/>
@@ -15941,218 +16206,41 @@
       </p:pic>
       <p:pic>
         <p:nvPicPr>
-          <p:cNvPr id="24" name="Picture 23"/>
+          <p:cNvPr id="32" name="Picture 31">
+            <a:extLst>
+              <a:ext uri="{FF2B5EF4-FFF2-40B4-BE49-F238E27FC236}">
+                <a16:creationId xmlns:a16="http://schemas.microsoft.com/office/drawing/2014/main" id="{3C5EEF00-D742-8520-2693-9BADB8219549}"/>
+              </a:ext>
+            </a:extLst>
+          </p:cNvPr>
           <p:cNvPicPr>
             <a:picLocks noChangeAspect="1"/>
           </p:cNvPicPr>
           <p:nvPr/>
         </p:nvPicPr>
         <p:blipFill>
-          <a:blip r:embed="rId4"/>
-          <a:stretch/>
+          <a:blip r:embed="rId4">
+            <a:extLst>
+              <a:ext uri="{28A0092B-C50C-407E-A947-70E740481C1C}">
+                <a14:useLocalDpi xmlns:a14="http://schemas.microsoft.com/office/drawing/2010/main" val="0"/>
+              </a:ext>
+            </a:extLst>
+          </a:blip>
+          <a:srcRect t="13589"/>
+          <a:stretch>
+            <a:fillRect/>
+          </a:stretch>
         </p:blipFill>
         <p:spPr>
           <a:xfrm>
-            <a:off x="6419850" y="3314700"/>
-            <a:ext cx="4762500" cy="1905000"/>
+            <a:off x="319241" y="2759277"/>
+            <a:ext cx="11210618" cy="3789680"/>
           </a:xfrm>
           <a:prstGeom prst="rect">
             <a:avLst/>
           </a:prstGeom>
         </p:spPr>
       </p:pic>
-      <p:sp>
-        <p:nvSpPr>
-          <p:cNvPr id="25" name="Rectangle 24">
-            <a:extLst>
-              <a:ext uri="{FF2B5EF4-FFF2-40B4-BE49-F238E27FC236}">
-                <a16:creationId xmlns:a16="http://schemas.microsoft.com/office/drawing/2014/main" id="{3ABF5993-102A-4407-9766-FE2CCB53CDA0}"/>
-              </a:ext>
-            </a:extLst>
-          </p:cNvPr>
-          <p:cNvSpPr>
-            <a:spLocks noGrp="1"/>
-          </p:cNvSpPr>
-          <p:nvPr/>
-        </p:nvSpPr>
-        <p:spPr>
-          <a:xfrm>
-            <a:off x="819150" y="5467350"/>
-            <a:ext cx="8858250" cy="285750"/>
-          </a:xfrm>
-          <a:prstGeom prst="rect">
-            <a:avLst/>
-          </a:prstGeom>
-          <a:solidFill>
-            <a:srgbClr val="000000">
-              <a:alpha val="0"/>
-            </a:srgbClr>
-          </a:solidFill>
-          <a:ln w="0">
-            <a:solidFill>
-              <a:srgbClr val="000000">
-                <a:alpha val="0"/>
-              </a:srgbClr>
-            </a:solidFill>
-            <a:prstDash val="solid"/>
-          </a:ln>
-        </p:spPr>
-        <p:txBody>
-          <a:bodyPr lIns="0" tIns="0" rIns="0" bIns="0" anchor="t"/>
-          <a:lstStyle/>
-          <a:p>
-            <a:pPr algn="l">
-              <a:defRPr sz="1275" b="0">
-                <a:solidFill>
-                  <a:srgbClr val="54677C"/>
-                </a:solidFill>
-                <a:latin typeface="Aptos"/>
-                <a:ea typeface="Aptos"/>
-                <a:cs typeface="Aptos"/>
-              </a:defRPr>
-            </a:pPr>
-            <a:r>
-              <a:rPr sz="1275" b="0">
-                <a:solidFill>
-                  <a:srgbClr val="54677C"/>
-                </a:solidFill>
-                <a:latin typeface="Aptos"/>
-                <a:ea typeface="Aptos"/>
-                <a:cs typeface="Aptos"/>
-              </a:rPr>
-              <a:t>Quality selection changes as measured throughput varies, while AI confidence remains high on average.</a:t>
-            </a:r>
-          </a:p>
-        </p:txBody>
-      </p:sp>
-      <p:sp>
-        <p:nvSpPr>
-          <p:cNvPr id="26" name="Rectangle 25">
-            <a:extLst>
-              <a:ext uri="{FF2B5EF4-FFF2-40B4-BE49-F238E27FC236}">
-                <a16:creationId xmlns:a16="http://schemas.microsoft.com/office/drawing/2014/main" id="{93ED8FA3-3B1B-4456-B278-5EA77B0BE7DE}"/>
-              </a:ext>
-            </a:extLst>
-          </p:cNvPr>
-          <p:cNvSpPr>
-            <a:spLocks noGrp="1"/>
-          </p:cNvSpPr>
-          <p:nvPr/>
-        </p:nvSpPr>
-        <p:spPr>
-          <a:xfrm>
-            <a:off x="514350" y="6438900"/>
-            <a:ext cx="7239000" cy="190500"/>
-          </a:xfrm>
-          <a:prstGeom prst="rect">
-            <a:avLst/>
-          </a:prstGeom>
-          <a:solidFill>
-            <a:srgbClr val="000000">
-              <a:alpha val="0"/>
-            </a:srgbClr>
-          </a:solidFill>
-          <a:ln w="0">
-            <a:solidFill>
-              <a:srgbClr val="000000">
-                <a:alpha val="0"/>
-              </a:srgbClr>
-            </a:solidFill>
-            <a:prstDash val="solid"/>
-          </a:ln>
-        </p:spPr>
-        <p:txBody>
-          <a:bodyPr lIns="0" tIns="0" rIns="0" bIns="0" anchor="t"/>
-          <a:lstStyle/>
-          <a:p>
-            <a:pPr algn="l">
-              <a:defRPr sz="750" b="0">
-                <a:solidFill>
-                  <a:srgbClr val="8EA3B8"/>
-                </a:solidFill>
-                <a:latin typeface="Aptos"/>
-                <a:ea typeface="Aptos"/>
-                <a:cs typeface="Aptos"/>
-              </a:defRPr>
-            </a:pPr>
-            <a:r>
-              <a:rPr sz="750" b="0">
-                <a:solidFill>
-                  <a:srgbClr val="8EA3B8"/>
-                </a:solidFill>
-                <a:latin typeface="Aptos"/>
-                <a:ea typeface="Aptos"/>
-                <a:cs typeface="Aptos"/>
-              </a:rPr>
-              <a:t>Source: results/qos_summary.csv, results/bandwidth_vs_time.png, results/bitrate_vs_time.png</a:t>
-            </a:r>
-          </a:p>
-        </p:txBody>
-      </p:sp>
-      <p:sp>
-        <p:nvSpPr>
-          <p:cNvPr id="27" name="Rectangle 26">
-            <a:extLst>
-              <a:ext uri="{FF2B5EF4-FFF2-40B4-BE49-F238E27FC236}">
-                <a16:creationId xmlns:a16="http://schemas.microsoft.com/office/drawing/2014/main" id="{D643C6AF-A1E2-4DEF-9BF7-AD0C9F5BBC5D}"/>
-              </a:ext>
-            </a:extLst>
-          </p:cNvPr>
-          <p:cNvSpPr>
-            <a:spLocks noGrp="1"/>
-          </p:cNvSpPr>
-          <p:nvPr/>
-        </p:nvSpPr>
-        <p:spPr>
-          <a:xfrm>
-            <a:off x="11163300" y="6438900"/>
-            <a:ext cx="514350" cy="190500"/>
-          </a:xfrm>
-          <a:prstGeom prst="rect">
-            <a:avLst/>
-          </a:prstGeom>
-          <a:solidFill>
-            <a:srgbClr val="000000">
-              <a:alpha val="0"/>
-            </a:srgbClr>
-          </a:solidFill>
-          <a:ln w="0">
-            <a:solidFill>
-              <a:srgbClr val="000000">
-                <a:alpha val="0"/>
-              </a:srgbClr>
-            </a:solidFill>
-            <a:prstDash val="solid"/>
-          </a:ln>
-        </p:spPr>
-        <p:txBody>
-          <a:bodyPr lIns="0" tIns="0" rIns="0" bIns="0" anchor="t"/>
-          <a:lstStyle/>
-          <a:p>
-            <a:pPr algn="r">
-              <a:defRPr sz="825" b="0">
-                <a:solidFill>
-                  <a:srgbClr val="8EA3B8"/>
-                </a:solidFill>
-                <a:latin typeface="Aptos Mono"/>
-                <a:ea typeface="Aptos Mono"/>
-                <a:cs typeface="Aptos Mono"/>
-              </a:defRPr>
-            </a:pPr>
-            <a:r>
-              <a:rPr sz="825" b="0">
-                <a:solidFill>
-                  <a:srgbClr val="8EA3B8"/>
-                </a:solidFill>
-                <a:latin typeface="Aptos Mono"/>
-                <a:ea typeface="Aptos Mono"/>
-                <a:cs typeface="Aptos Mono"/>
-              </a:rPr>
-              <a:t>08</a:t>
-            </a:r>
-          </a:p>
-        </p:txBody>
-      </p:sp>
     </p:spTree>
     <p:extLst>
       <p:ext uri="{BB962C8B-B14F-4D97-AF65-F5344CB8AC3E}">
